--- a/2026-06-07 El Camino Baptist Church-CH.pptx
+++ b/2026-06-07 El Camino Baptist Church-CH.pptx
@@ -36,15 +36,16 @@
     <p:sldId id="300" r:id="rId30"/>
     <p:sldId id="301" r:id="rId31"/>
     <p:sldId id="302" r:id="rId32"/>
-    <p:sldId id="303" r:id="rId33"/>
-    <p:sldId id="304" r:id="rId34"/>
-    <p:sldId id="305" r:id="rId35"/>
-    <p:sldId id="306" r:id="rId36"/>
-    <p:sldId id="307" r:id="rId37"/>
-    <p:sldId id="308" r:id="rId38"/>
-    <p:sldId id="309" r:id="rId39"/>
-    <p:sldId id="310" r:id="rId40"/>
-    <p:sldId id="281" r:id="rId41"/>
+    <p:sldId id="311" r:id="rId33"/>
+    <p:sldId id="303" r:id="rId34"/>
+    <p:sldId id="304" r:id="rId35"/>
+    <p:sldId id="305" r:id="rId36"/>
+    <p:sldId id="306" r:id="rId37"/>
+    <p:sldId id="307" r:id="rId38"/>
+    <p:sldId id="308" r:id="rId39"/>
+    <p:sldId id="309" r:id="rId40"/>
+    <p:sldId id="310" r:id="rId41"/>
+    <p:sldId id="281" r:id="rId42"/>
   </p:sldIdLst>
   <p:sldSz cx="12192000" cy="6858000"/>
   <p:notesSz cx="6858000" cy="9144000"/>
@@ -298,7 +299,7 @@
           <a:p>
             <a:fld id="{E759A0DE-F190-5444-87AC-4719D5F20D15}" type="datetimeFigureOut">
               <a:rPr lang="en-US" smtClean="0"/>
-              <a:t>6/6/26</a:t>
+              <a:t>6/7/26</a:t>
             </a:fld>
             <a:endParaRPr lang="en-US"/>
           </a:p>
@@ -496,7 +497,7 @@
           <a:p>
             <a:fld id="{E759A0DE-F190-5444-87AC-4719D5F20D15}" type="datetimeFigureOut">
               <a:rPr lang="en-US" smtClean="0"/>
-              <a:t>6/6/26</a:t>
+              <a:t>6/7/26</a:t>
             </a:fld>
             <a:endParaRPr lang="en-US"/>
           </a:p>
@@ -704,7 +705,7 @@
           <a:p>
             <a:fld id="{E759A0DE-F190-5444-87AC-4719D5F20D15}" type="datetimeFigureOut">
               <a:rPr lang="en-US" smtClean="0"/>
-              <a:t>6/6/26</a:t>
+              <a:t>6/7/26</a:t>
             </a:fld>
             <a:endParaRPr lang="en-US"/>
           </a:p>
@@ -902,7 +903,7 @@
           <a:p>
             <a:fld id="{E759A0DE-F190-5444-87AC-4719D5F20D15}" type="datetimeFigureOut">
               <a:rPr lang="en-US" smtClean="0"/>
-              <a:t>6/6/26</a:t>
+              <a:t>6/7/26</a:t>
             </a:fld>
             <a:endParaRPr lang="en-US"/>
           </a:p>
@@ -1177,7 +1178,7 @@
           <a:p>
             <a:fld id="{E759A0DE-F190-5444-87AC-4719D5F20D15}" type="datetimeFigureOut">
               <a:rPr lang="en-US" smtClean="0"/>
-              <a:t>6/6/26</a:t>
+              <a:t>6/7/26</a:t>
             </a:fld>
             <a:endParaRPr lang="en-US"/>
           </a:p>
@@ -1442,7 +1443,7 @@
           <a:p>
             <a:fld id="{E759A0DE-F190-5444-87AC-4719D5F20D15}" type="datetimeFigureOut">
               <a:rPr lang="en-US" smtClean="0"/>
-              <a:t>6/6/26</a:t>
+              <a:t>6/7/26</a:t>
             </a:fld>
             <a:endParaRPr lang="en-US"/>
           </a:p>
@@ -1854,7 +1855,7 @@
           <a:p>
             <a:fld id="{E759A0DE-F190-5444-87AC-4719D5F20D15}" type="datetimeFigureOut">
               <a:rPr lang="en-US" smtClean="0"/>
-              <a:t>6/6/26</a:t>
+              <a:t>6/7/26</a:t>
             </a:fld>
             <a:endParaRPr lang="en-US"/>
           </a:p>
@@ -1995,7 +1996,7 @@
           <a:p>
             <a:fld id="{E759A0DE-F190-5444-87AC-4719D5F20D15}" type="datetimeFigureOut">
               <a:rPr lang="en-US" smtClean="0"/>
-              <a:t>6/6/26</a:t>
+              <a:t>6/7/26</a:t>
             </a:fld>
             <a:endParaRPr lang="en-US"/>
           </a:p>
@@ -2108,7 +2109,7 @@
           <a:p>
             <a:fld id="{E759A0DE-F190-5444-87AC-4719D5F20D15}" type="datetimeFigureOut">
               <a:rPr lang="en-US" smtClean="0"/>
-              <a:t>6/6/26</a:t>
+              <a:t>6/7/26</a:t>
             </a:fld>
             <a:endParaRPr lang="en-US"/>
           </a:p>
@@ -2419,7 +2420,7 @@
           <a:p>
             <a:fld id="{E759A0DE-F190-5444-87AC-4719D5F20D15}" type="datetimeFigureOut">
               <a:rPr lang="en-US" smtClean="0"/>
-              <a:t>6/6/26</a:t>
+              <a:t>6/7/26</a:t>
             </a:fld>
             <a:endParaRPr lang="en-US"/>
           </a:p>
@@ -2707,7 +2708,7 @@
           <a:p>
             <a:fld id="{E759A0DE-F190-5444-87AC-4719D5F20D15}" type="datetimeFigureOut">
               <a:rPr lang="en-US" smtClean="0"/>
-              <a:t>6/6/26</a:t>
+              <a:t>6/7/26</a:t>
             </a:fld>
             <a:endParaRPr lang="en-US"/>
           </a:p>
@@ -2948,7 +2949,7 @@
           <a:p>
             <a:fld id="{E759A0DE-F190-5444-87AC-4719D5F20D15}" type="datetimeFigureOut">
               <a:rPr lang="en-US" smtClean="0"/>
-              <a:t>6/6/26</a:t>
+              <a:t>6/7/26</a:t>
             </a:fld>
             <a:endParaRPr lang="en-US"/>
           </a:p>
@@ -5743,6 +5744,45 @@
           </a:p>
         </p:txBody>
       </p:sp>
+      <p:sp>
+        <p:nvSpPr>
+          <p:cNvPr id="2" name="TextBox 1">
+            <a:extLst>
+              <a:ext uri="{FF2B5EF4-FFF2-40B4-BE49-F238E27FC236}">
+                <a16:creationId xmlns:a16="http://schemas.microsoft.com/office/drawing/2014/main" id="{F6750075-0597-30A0-E9B5-46DA0EEE0D7F}"/>
+              </a:ext>
+            </a:extLst>
+          </p:cNvPr>
+          <p:cNvSpPr txBox="1"/>
+          <p:nvPr/>
+        </p:nvSpPr>
+        <p:spPr>
+          <a:xfrm>
+            <a:off x="10668000" y="6175513"/>
+            <a:ext cx="1524000" cy="523220"/>
+          </a:xfrm>
+          <a:prstGeom prst="rect">
+            <a:avLst/>
+          </a:prstGeom>
+          <a:noFill/>
+        </p:spPr>
+        <p:txBody>
+          <a:bodyPr wrap="square" rtlCol="0">
+            <a:spAutoFit/>
+          </a:bodyPr>
+          <a:lstStyle/>
+          <a:p>
+            <a:r>
+              <a:rPr lang="en-US" sz="2800" b="1" dirty="0">
+                <a:solidFill>
+                  <a:srgbClr val="FF0000"/>
+                </a:solidFill>
+              </a:rPr>
+              <a:t>END</a:t>
+            </a:r>
+          </a:p>
+        </p:txBody>
+      </p:sp>
     </p:spTree>
     <p:extLst>
       <p:ext uri="{BB962C8B-B14F-4D97-AF65-F5344CB8AC3E}">
@@ -7733,6 +7773,45 @@
           </a:p>
         </p:txBody>
       </p:sp>
+      <p:sp>
+        <p:nvSpPr>
+          <p:cNvPr id="2" name="TextBox 1">
+            <a:extLst>
+              <a:ext uri="{FF2B5EF4-FFF2-40B4-BE49-F238E27FC236}">
+                <a16:creationId xmlns:a16="http://schemas.microsoft.com/office/drawing/2014/main" id="{9B85C745-E465-00DD-06D5-908C629B5BF4}"/>
+              </a:ext>
+            </a:extLst>
+          </p:cNvPr>
+          <p:cNvSpPr txBox="1"/>
+          <p:nvPr/>
+        </p:nvSpPr>
+        <p:spPr>
+          <a:xfrm>
+            <a:off x="10668000" y="6175513"/>
+            <a:ext cx="1524000" cy="523220"/>
+          </a:xfrm>
+          <a:prstGeom prst="rect">
+            <a:avLst/>
+          </a:prstGeom>
+          <a:noFill/>
+        </p:spPr>
+        <p:txBody>
+          <a:bodyPr wrap="square" rtlCol="0">
+            <a:spAutoFit/>
+          </a:bodyPr>
+          <a:lstStyle/>
+          <a:p>
+            <a:r>
+              <a:rPr lang="en-US" sz="2800" b="1" dirty="0">
+                <a:solidFill>
+                  <a:srgbClr val="FF0000"/>
+                </a:solidFill>
+              </a:rPr>
+              <a:t>END</a:t>
+            </a:r>
+          </a:p>
+        </p:txBody>
+      </p:sp>
     </p:spTree>
     <p:extLst>
       <p:ext uri="{BB962C8B-B14F-4D97-AF65-F5344CB8AC3E}">
@@ -9249,6 +9328,232 @@
     <p:bg>
       <p:bgPr>
         <a:solidFill>
+          <a:schemeClr val="accent1"/>
+        </a:solidFill>
+        <a:effectLst/>
+      </p:bgPr>
+    </p:bg>
+    <p:spTree>
+      <p:nvGrpSpPr>
+        <p:cNvPr id="1" name="">
+          <a:extLst>
+            <a:ext uri="{FF2B5EF4-FFF2-40B4-BE49-F238E27FC236}">
+              <a16:creationId xmlns:a16="http://schemas.microsoft.com/office/drawing/2014/main" id="{0B86CFC8-1ED1-B65F-8F2B-AD4EFB162D4A}"/>
+            </a:ext>
+          </a:extLst>
+        </p:cNvPr>
+        <p:cNvGrpSpPr/>
+        <p:nvPr/>
+      </p:nvGrpSpPr>
+      <p:grpSpPr>
+        <a:xfrm>
+          <a:off x="0" y="0"/>
+          <a:ext cx="0" cy="0"/>
+          <a:chOff x="0" y="0"/>
+          <a:chExt cx="0" cy="0"/>
+        </a:xfrm>
+      </p:grpSpPr>
+      <p:sp>
+        <p:nvSpPr>
+          <p:cNvPr id="3" name="Subtitle 2">
+            <a:extLst>
+              <a:ext uri="{FF2B5EF4-FFF2-40B4-BE49-F238E27FC236}">
+                <a16:creationId xmlns:a16="http://schemas.microsoft.com/office/drawing/2014/main" id="{157CB85C-2036-DBCC-D522-7FE01B530457}"/>
+              </a:ext>
+            </a:extLst>
+          </p:cNvPr>
+          <p:cNvSpPr>
+            <a:spLocks noGrp="1"/>
+          </p:cNvSpPr>
+          <p:nvPr>
+            <p:ph type="subTitle" idx="1"/>
+          </p:nvPr>
+        </p:nvSpPr>
+        <p:spPr>
+          <a:xfrm>
+            <a:off x="682831" y="497702"/>
+            <a:ext cx="10826338" cy="5862596"/>
+          </a:xfrm>
+        </p:spPr>
+        <p:txBody>
+          <a:bodyPr>
+            <a:noAutofit/>
+          </a:bodyPr>
+          <a:lstStyle/>
+          <a:p>
+            <a:pPr algn="l"/>
+            <a:endParaRPr lang="en-US" sz="2800" dirty="0">
+              <a:solidFill>
+                <a:schemeClr val="bg1"/>
+              </a:solidFill>
+              <a:latin typeface="Avenir Medium" panose="02000503020000020003" pitchFamily="2" charset="0"/>
+              <a:ea typeface="Bodoni Ornaments" pitchFamily="2" charset="0"/>
+            </a:endParaRPr>
+          </a:p>
+          <a:p>
+            <a:pPr algn="l"/>
+            <a:r>
+              <a:rPr lang="en-US" sz="2800" dirty="0">
+                <a:solidFill>
+                  <a:srgbClr val="FFFF00"/>
+                </a:solidFill>
+                <a:latin typeface="Avenir Medium" panose="02000503020000020003" pitchFamily="2" charset="0"/>
+                <a:ea typeface="Bodoni Ornaments" pitchFamily="2" charset="0"/>
+              </a:rPr>
+              <a:t>Am            D          G                    C</a:t>
+            </a:r>
+          </a:p>
+          <a:p>
+            <a:pPr algn="l"/>
+            <a:r>
+              <a:rPr lang="en-US" sz="2800" dirty="0">
+                <a:solidFill>
+                  <a:schemeClr val="bg1"/>
+                </a:solidFill>
+                <a:latin typeface="Avenir Medium" panose="02000503020000020003" pitchFamily="2" charset="0"/>
+                <a:ea typeface="Bodoni Ornaments" pitchFamily="2" charset="0"/>
+              </a:rPr>
+              <a:t>Here I am waiting, abide in me I pray </a:t>
+            </a:r>
+          </a:p>
+          <a:p>
+            <a:pPr algn="l"/>
+            <a:r>
+              <a:rPr lang="en-US" sz="2800" dirty="0">
+                <a:solidFill>
+                  <a:srgbClr val="FFFF00"/>
+                </a:solidFill>
+                <a:latin typeface="Avenir Medium" panose="02000503020000020003" pitchFamily="2" charset="0"/>
+                <a:ea typeface="Bodoni Ornaments" pitchFamily="2" charset="0"/>
+              </a:rPr>
+              <a:t>Am           D                 G</a:t>
+            </a:r>
+          </a:p>
+          <a:p>
+            <a:pPr algn="l"/>
+            <a:r>
+              <a:rPr lang="en-US" sz="2800" dirty="0">
+                <a:solidFill>
+                  <a:schemeClr val="bg1"/>
+                </a:solidFill>
+                <a:latin typeface="Avenir Medium" panose="02000503020000020003" pitchFamily="2" charset="0"/>
+                <a:ea typeface="Bodoni Ornaments" pitchFamily="2" charset="0"/>
+              </a:rPr>
+              <a:t>Here I am longing for You </a:t>
+            </a:r>
+          </a:p>
+          <a:p>
+            <a:pPr algn="l"/>
+            <a:r>
+              <a:rPr lang="en-US" sz="2800" dirty="0">
+                <a:solidFill>
+                  <a:srgbClr val="FFFF00"/>
+                </a:solidFill>
+                <a:latin typeface="Avenir Medium" panose="02000503020000020003" pitchFamily="2" charset="0"/>
+                <a:ea typeface="Bodoni Ornaments" pitchFamily="2" charset="0"/>
+              </a:rPr>
+              <a:t>Am                      D     G                        C</a:t>
+            </a:r>
+          </a:p>
+          <a:p>
+            <a:pPr algn="l"/>
+            <a:r>
+              <a:rPr lang="en-US" sz="2800" dirty="0">
+                <a:solidFill>
+                  <a:schemeClr val="bg1"/>
+                </a:solidFill>
+                <a:latin typeface="Avenir Medium" panose="02000503020000020003" pitchFamily="2" charset="0"/>
+                <a:ea typeface="Bodoni Ornaments" pitchFamily="2" charset="0"/>
+              </a:rPr>
+              <a:t>Hide me in Your love, bring me to my knees </a:t>
+            </a:r>
+          </a:p>
+          <a:p>
+            <a:pPr algn="l"/>
+            <a:r>
+              <a:rPr lang="en-US" sz="2800" dirty="0">
+                <a:solidFill>
+                  <a:srgbClr val="FFFF00"/>
+                </a:solidFill>
+                <a:latin typeface="Avenir Medium" panose="02000503020000020003" pitchFamily="2" charset="0"/>
+                <a:ea typeface="Bodoni Ornaments" pitchFamily="2" charset="0"/>
+              </a:rPr>
+              <a:t>Am              D                        G         C  D</a:t>
+            </a:r>
+          </a:p>
+          <a:p>
+            <a:pPr algn="l"/>
+            <a:r>
+              <a:rPr lang="en-US" sz="2800" dirty="0">
+                <a:solidFill>
+                  <a:schemeClr val="bg1"/>
+                </a:solidFill>
+                <a:latin typeface="Avenir Medium" panose="02000503020000020003" pitchFamily="2" charset="0"/>
+                <a:ea typeface="Bodoni Ornaments" pitchFamily="2" charset="0"/>
+              </a:rPr>
+              <a:t>May I know Jesus more and more </a:t>
+            </a:r>
+          </a:p>
+        </p:txBody>
+      </p:sp>
+      <p:sp>
+        <p:nvSpPr>
+          <p:cNvPr id="2" name="TextBox 1">
+            <a:extLst>
+              <a:ext uri="{FF2B5EF4-FFF2-40B4-BE49-F238E27FC236}">
+                <a16:creationId xmlns:a16="http://schemas.microsoft.com/office/drawing/2014/main" id="{5746D8FE-D067-E189-6DD3-0F460F1CD82C}"/>
+              </a:ext>
+            </a:extLst>
+          </p:cNvPr>
+          <p:cNvSpPr txBox="1"/>
+          <p:nvPr/>
+        </p:nvSpPr>
+        <p:spPr>
+          <a:xfrm>
+            <a:off x="10668000" y="6175513"/>
+            <a:ext cx="1524000" cy="523220"/>
+          </a:xfrm>
+          <a:prstGeom prst="rect">
+            <a:avLst/>
+          </a:prstGeom>
+          <a:noFill/>
+        </p:spPr>
+        <p:txBody>
+          <a:bodyPr wrap="square" rtlCol="0">
+            <a:spAutoFit/>
+          </a:bodyPr>
+          <a:lstStyle/>
+          <a:p>
+            <a:r>
+              <a:rPr lang="en-US" sz="2800" b="1" dirty="0">
+                <a:solidFill>
+                  <a:srgbClr val="FF0000"/>
+                </a:solidFill>
+              </a:rPr>
+              <a:t>END</a:t>
+            </a:r>
+          </a:p>
+        </p:txBody>
+      </p:sp>
+    </p:spTree>
+    <p:extLst>
+      <p:ext uri="{BB962C8B-B14F-4D97-AF65-F5344CB8AC3E}">
+        <p14:creationId xmlns:p14="http://schemas.microsoft.com/office/powerpoint/2010/main" val="3260784188"/>
+      </p:ext>
+    </p:extLst>
+  </p:cSld>
+  <p:clrMapOvr>
+    <a:masterClrMapping/>
+  </p:clrMapOvr>
+</p:sld>
+</file>
+
+<file path=ppt/slides/slide33.xml><?xml version="1.0" encoding="utf-8"?>
+<p:sld xmlns:a="http://schemas.openxmlformats.org/drawingml/2006/main" xmlns:r="http://schemas.openxmlformats.org/officeDocument/2006/relationships" xmlns:p="http://schemas.openxmlformats.org/presentationml/2006/main">
+  <p:cSld>
+    <p:bg>
+      <p:bgPr>
+        <a:solidFill>
           <a:schemeClr val="bg1"/>
         </a:solidFill>
         <a:effectLst/>
@@ -9760,7 +10065,7 @@
 </p:sld>
 </file>
 
-<file path=ppt/slides/slide33.xml><?xml version="1.0" encoding="utf-8"?>
+<file path=ppt/slides/slide34.xml><?xml version="1.0" encoding="utf-8"?>
 <p:sld xmlns:a="http://schemas.openxmlformats.org/drawingml/2006/main" xmlns:r="http://schemas.openxmlformats.org/officeDocument/2006/relationships" xmlns:p="http://schemas.openxmlformats.org/presentationml/2006/main">
   <p:cSld>
     <p:bg>
@@ -9967,7 +10272,7 @@
 </p:sld>
 </file>
 
-<file path=ppt/slides/slide34.xml><?xml version="1.0" encoding="utf-8"?>
+<file path=ppt/slides/slide35.xml><?xml version="1.0" encoding="utf-8"?>
 <p:sld xmlns:a="http://schemas.openxmlformats.org/drawingml/2006/main" xmlns:r="http://schemas.openxmlformats.org/officeDocument/2006/relationships" xmlns:p="http://schemas.openxmlformats.org/presentationml/2006/main">
   <p:cSld>
     <p:bg>
@@ -10128,7 +10433,7 @@
 </p:sld>
 </file>
 
-<file path=ppt/slides/slide35.xml><?xml version="1.0" encoding="utf-8"?>
+<file path=ppt/slides/slide36.xml><?xml version="1.0" encoding="utf-8"?>
 <p:sld xmlns:a="http://schemas.openxmlformats.org/drawingml/2006/main" xmlns:r="http://schemas.openxmlformats.org/officeDocument/2006/relationships" xmlns:p="http://schemas.openxmlformats.org/presentationml/2006/main">
   <p:cSld>
     <p:bg>
@@ -10315,7 +10620,7 @@
 </p:sld>
 </file>
 
-<file path=ppt/slides/slide36.xml><?xml version="1.0" encoding="utf-8"?>
+<file path=ppt/slides/slide37.xml><?xml version="1.0" encoding="utf-8"?>
 <p:sld xmlns:a="http://schemas.openxmlformats.org/drawingml/2006/main" xmlns:r="http://schemas.openxmlformats.org/officeDocument/2006/relationships" xmlns:p="http://schemas.openxmlformats.org/presentationml/2006/main">
   <p:cSld>
     <p:bg>
@@ -10476,7 +10781,7 @@
 </p:sld>
 </file>
 
-<file path=ppt/slides/slide37.xml><?xml version="1.0" encoding="utf-8"?>
+<file path=ppt/slides/slide38.xml><?xml version="1.0" encoding="utf-8"?>
 <p:sld xmlns:a="http://schemas.openxmlformats.org/drawingml/2006/main" xmlns:r="http://schemas.openxmlformats.org/officeDocument/2006/relationships" xmlns:p="http://schemas.openxmlformats.org/presentationml/2006/main">
   <p:cSld>
     <p:bg>
@@ -10663,7 +10968,7 @@
 </p:sld>
 </file>
 
-<file path=ppt/slides/slide38.xml><?xml version="1.0" encoding="utf-8"?>
+<file path=ppt/slides/slide39.xml><?xml version="1.0" encoding="utf-8"?>
 <p:sld xmlns:a="http://schemas.openxmlformats.org/drawingml/2006/main" xmlns:r="http://schemas.openxmlformats.org/officeDocument/2006/relationships" xmlns:p="http://schemas.openxmlformats.org/presentationml/2006/main">
   <p:cSld>
     <p:bg>
@@ -10815,193 +11120,6 @@
     <p:extLst>
       <p:ext uri="{BB962C8B-B14F-4D97-AF65-F5344CB8AC3E}">
         <p14:creationId xmlns:p14="http://schemas.microsoft.com/office/powerpoint/2010/main" val="544536014"/>
-      </p:ext>
-    </p:extLst>
-  </p:cSld>
-  <p:clrMapOvr>
-    <a:masterClrMapping/>
-  </p:clrMapOvr>
-</p:sld>
-</file>
-
-<file path=ppt/slides/slide39.xml><?xml version="1.0" encoding="utf-8"?>
-<p:sld xmlns:a="http://schemas.openxmlformats.org/drawingml/2006/main" xmlns:r="http://schemas.openxmlformats.org/officeDocument/2006/relationships" xmlns:p="http://schemas.openxmlformats.org/presentationml/2006/main">
-  <p:cSld>
-    <p:bg>
-      <p:bgPr>
-        <a:solidFill>
-          <a:schemeClr val="accent1"/>
-        </a:solidFill>
-        <a:effectLst/>
-      </p:bgPr>
-    </p:bg>
-    <p:spTree>
-      <p:nvGrpSpPr>
-        <p:cNvPr id="1" name="">
-          <a:extLst>
-            <a:ext uri="{FF2B5EF4-FFF2-40B4-BE49-F238E27FC236}">
-              <a16:creationId xmlns:a16="http://schemas.microsoft.com/office/drawing/2014/main" id="{BBD4447A-720C-CA96-7725-4077679A1B1F}"/>
-            </a:ext>
-          </a:extLst>
-        </p:cNvPr>
-        <p:cNvGrpSpPr/>
-        <p:nvPr/>
-      </p:nvGrpSpPr>
-      <p:grpSpPr>
-        <a:xfrm>
-          <a:off x="0" y="0"/>
-          <a:ext cx="0" cy="0"/>
-          <a:chOff x="0" y="0"/>
-          <a:chExt cx="0" cy="0"/>
-        </a:xfrm>
-      </p:grpSpPr>
-      <p:sp>
-        <p:nvSpPr>
-          <p:cNvPr id="3" name="Subtitle 2">
-            <a:extLst>
-              <a:ext uri="{FF2B5EF4-FFF2-40B4-BE49-F238E27FC236}">
-                <a16:creationId xmlns:a16="http://schemas.microsoft.com/office/drawing/2014/main" id="{3735616B-7ADC-8E71-444D-852045398E76}"/>
-              </a:ext>
-            </a:extLst>
-          </p:cNvPr>
-          <p:cNvSpPr>
-            <a:spLocks noGrp="1"/>
-          </p:cNvSpPr>
-          <p:nvPr>
-            <p:ph type="subTitle" idx="1"/>
-          </p:nvPr>
-        </p:nvSpPr>
-        <p:spPr>
-          <a:xfrm>
-            <a:off x="682831" y="497702"/>
-            <a:ext cx="10826338" cy="5862596"/>
-          </a:xfrm>
-        </p:spPr>
-        <p:txBody>
-          <a:bodyPr>
-            <a:noAutofit/>
-          </a:bodyPr>
-          <a:lstStyle/>
-          <a:p>
-            <a:pPr algn="l"/>
-            <a:endParaRPr lang="en-US" sz="2800" dirty="0">
-              <a:solidFill>
-                <a:schemeClr val="bg1"/>
-              </a:solidFill>
-              <a:latin typeface="Avenir Medium" panose="02000503020000020003" pitchFamily="2" charset="0"/>
-              <a:ea typeface="Bodoni Ornaments" pitchFamily="2" charset="0"/>
-            </a:endParaRPr>
-          </a:p>
-          <a:p>
-            <a:pPr algn="l"/>
-            <a:r>
-              <a:rPr lang="en-US" sz="2800" dirty="0">
-                <a:solidFill>
-                  <a:srgbClr val="FFFF00"/>
-                </a:solidFill>
-                <a:latin typeface="Avenir Medium" panose="02000503020000020003" pitchFamily="2" charset="0"/>
-                <a:ea typeface="Bodoni Ornaments" pitchFamily="2" charset="0"/>
-              </a:rPr>
-              <a:t>         G                                               C     D         G</a:t>
-            </a:r>
-          </a:p>
-          <a:p>
-            <a:pPr algn="l"/>
-            <a:r>
-              <a:rPr lang="en-US" sz="2800" dirty="0">
-                <a:solidFill>
-                  <a:schemeClr val="bg1"/>
-                </a:solidFill>
-                <a:latin typeface="Avenir Medium" panose="02000503020000020003" pitchFamily="2" charset="0"/>
-                <a:ea typeface="Bodoni Ornaments" pitchFamily="2" charset="0"/>
-              </a:rPr>
-              <a:t>And, Lord haste the day when the faith shall be sight</a:t>
-            </a:r>
-          </a:p>
-          <a:p>
-            <a:pPr algn="l"/>
-            <a:r>
-              <a:rPr lang="en-US" sz="2800" dirty="0">
-                <a:solidFill>
-                  <a:srgbClr val="FFFF00"/>
-                </a:solidFill>
-                <a:latin typeface="Avenir Medium" panose="02000503020000020003" pitchFamily="2" charset="0"/>
-                <a:ea typeface="Bodoni Ornaments" pitchFamily="2" charset="0"/>
-              </a:rPr>
-              <a:t>       Em                      A              D</a:t>
-            </a:r>
-          </a:p>
-          <a:p>
-            <a:pPr algn="l"/>
-            <a:r>
-              <a:rPr lang="en-US" sz="2800" dirty="0">
-                <a:solidFill>
-                  <a:schemeClr val="bg1"/>
-                </a:solidFill>
-                <a:latin typeface="Avenir Medium" panose="02000503020000020003" pitchFamily="2" charset="0"/>
-                <a:ea typeface="Bodoni Ornaments" pitchFamily="2" charset="0"/>
-              </a:rPr>
-              <a:t>The clouds be rolled back as a scroll</a:t>
-            </a:r>
-          </a:p>
-          <a:p>
-            <a:pPr algn="l"/>
-            <a:r>
-              <a:rPr lang="en-US" sz="2800" dirty="0">
-                <a:solidFill>
-                  <a:srgbClr val="FFFF00"/>
-                </a:solidFill>
-                <a:latin typeface="Avenir Medium" panose="02000503020000020003" pitchFamily="2" charset="0"/>
-                <a:ea typeface="Bodoni Ornaments" pitchFamily="2" charset="0"/>
-              </a:rPr>
-              <a:t>       G                C                          A              D </a:t>
-            </a:r>
-          </a:p>
-          <a:p>
-            <a:pPr algn="l"/>
-            <a:r>
-              <a:rPr lang="en-US" sz="2800" dirty="0">
-                <a:solidFill>
-                  <a:schemeClr val="bg1"/>
-                </a:solidFill>
-                <a:latin typeface="Avenir Medium" panose="02000503020000020003" pitchFamily="2" charset="0"/>
-                <a:ea typeface="Bodoni Ornaments" pitchFamily="2" charset="0"/>
-              </a:rPr>
-              <a:t>The trump shall resound and the Lord shall descend</a:t>
-            </a:r>
-          </a:p>
-          <a:p>
-            <a:pPr algn="l"/>
-            <a:r>
-              <a:rPr lang="en-US" sz="2800" dirty="0">
-                <a:solidFill>
-                  <a:srgbClr val="FFFF00"/>
-                </a:solidFill>
-                <a:latin typeface="Avenir Medium" panose="02000503020000020003" pitchFamily="2" charset="0"/>
-                <a:ea typeface="Bodoni Ornaments" pitchFamily="2" charset="0"/>
-              </a:rPr>
-              <a:t>     G               C     D          G</a:t>
-            </a:r>
-          </a:p>
-          <a:p>
-            <a:pPr algn="l"/>
-            <a:r>
-              <a:rPr lang="en-US" sz="2800" dirty="0">
-                <a:solidFill>
-                  <a:schemeClr val="bg1"/>
-                </a:solidFill>
-                <a:latin typeface="Avenir Medium" panose="02000503020000020003" pitchFamily="2" charset="0"/>
-                <a:ea typeface="Bodoni Ornaments" pitchFamily="2" charset="0"/>
-              </a:rPr>
-              <a:t>Even so - it is well with my soul</a:t>
-            </a:r>
-          </a:p>
-        </p:txBody>
-      </p:sp>
-    </p:spTree>
-    <p:extLst>
-      <p:ext uri="{BB962C8B-B14F-4D97-AF65-F5344CB8AC3E}">
-        <p14:creationId xmlns:p14="http://schemas.microsoft.com/office/powerpoint/2010/main" val="2480558772"/>
       </p:ext>
     </p:extLst>
   </p:cSld>
@@ -11234,6 +11352,193 @@
     <p:bg>
       <p:bgPr>
         <a:solidFill>
+          <a:schemeClr val="accent1"/>
+        </a:solidFill>
+        <a:effectLst/>
+      </p:bgPr>
+    </p:bg>
+    <p:spTree>
+      <p:nvGrpSpPr>
+        <p:cNvPr id="1" name="">
+          <a:extLst>
+            <a:ext uri="{FF2B5EF4-FFF2-40B4-BE49-F238E27FC236}">
+              <a16:creationId xmlns:a16="http://schemas.microsoft.com/office/drawing/2014/main" id="{BBD4447A-720C-CA96-7725-4077679A1B1F}"/>
+            </a:ext>
+          </a:extLst>
+        </p:cNvPr>
+        <p:cNvGrpSpPr/>
+        <p:nvPr/>
+      </p:nvGrpSpPr>
+      <p:grpSpPr>
+        <a:xfrm>
+          <a:off x="0" y="0"/>
+          <a:ext cx="0" cy="0"/>
+          <a:chOff x="0" y="0"/>
+          <a:chExt cx="0" cy="0"/>
+        </a:xfrm>
+      </p:grpSpPr>
+      <p:sp>
+        <p:nvSpPr>
+          <p:cNvPr id="3" name="Subtitle 2">
+            <a:extLst>
+              <a:ext uri="{FF2B5EF4-FFF2-40B4-BE49-F238E27FC236}">
+                <a16:creationId xmlns:a16="http://schemas.microsoft.com/office/drawing/2014/main" id="{3735616B-7ADC-8E71-444D-852045398E76}"/>
+              </a:ext>
+            </a:extLst>
+          </p:cNvPr>
+          <p:cNvSpPr>
+            <a:spLocks noGrp="1"/>
+          </p:cNvSpPr>
+          <p:nvPr>
+            <p:ph type="subTitle" idx="1"/>
+          </p:nvPr>
+        </p:nvSpPr>
+        <p:spPr>
+          <a:xfrm>
+            <a:off x="682831" y="497702"/>
+            <a:ext cx="10826338" cy="5862596"/>
+          </a:xfrm>
+        </p:spPr>
+        <p:txBody>
+          <a:bodyPr>
+            <a:noAutofit/>
+          </a:bodyPr>
+          <a:lstStyle/>
+          <a:p>
+            <a:pPr algn="l"/>
+            <a:endParaRPr lang="en-US" sz="2800" dirty="0">
+              <a:solidFill>
+                <a:schemeClr val="bg1"/>
+              </a:solidFill>
+              <a:latin typeface="Avenir Medium" panose="02000503020000020003" pitchFamily="2" charset="0"/>
+              <a:ea typeface="Bodoni Ornaments" pitchFamily="2" charset="0"/>
+            </a:endParaRPr>
+          </a:p>
+          <a:p>
+            <a:pPr algn="l"/>
+            <a:r>
+              <a:rPr lang="en-US" sz="2800" dirty="0">
+                <a:solidFill>
+                  <a:srgbClr val="FFFF00"/>
+                </a:solidFill>
+                <a:latin typeface="Avenir Medium" panose="02000503020000020003" pitchFamily="2" charset="0"/>
+                <a:ea typeface="Bodoni Ornaments" pitchFamily="2" charset="0"/>
+              </a:rPr>
+              <a:t>         G                                               C     D         G</a:t>
+            </a:r>
+          </a:p>
+          <a:p>
+            <a:pPr algn="l"/>
+            <a:r>
+              <a:rPr lang="en-US" sz="2800" dirty="0">
+                <a:solidFill>
+                  <a:schemeClr val="bg1"/>
+                </a:solidFill>
+                <a:latin typeface="Avenir Medium" panose="02000503020000020003" pitchFamily="2" charset="0"/>
+                <a:ea typeface="Bodoni Ornaments" pitchFamily="2" charset="0"/>
+              </a:rPr>
+              <a:t>And, Lord haste the day when the faith shall be sight</a:t>
+            </a:r>
+          </a:p>
+          <a:p>
+            <a:pPr algn="l"/>
+            <a:r>
+              <a:rPr lang="en-US" sz="2800" dirty="0">
+                <a:solidFill>
+                  <a:srgbClr val="FFFF00"/>
+                </a:solidFill>
+                <a:latin typeface="Avenir Medium" panose="02000503020000020003" pitchFamily="2" charset="0"/>
+                <a:ea typeface="Bodoni Ornaments" pitchFamily="2" charset="0"/>
+              </a:rPr>
+              <a:t>       Em                      A              D</a:t>
+            </a:r>
+          </a:p>
+          <a:p>
+            <a:pPr algn="l"/>
+            <a:r>
+              <a:rPr lang="en-US" sz="2800" dirty="0">
+                <a:solidFill>
+                  <a:schemeClr val="bg1"/>
+                </a:solidFill>
+                <a:latin typeface="Avenir Medium" panose="02000503020000020003" pitchFamily="2" charset="0"/>
+                <a:ea typeface="Bodoni Ornaments" pitchFamily="2" charset="0"/>
+              </a:rPr>
+              <a:t>The clouds be rolled back as a scroll</a:t>
+            </a:r>
+          </a:p>
+          <a:p>
+            <a:pPr algn="l"/>
+            <a:r>
+              <a:rPr lang="en-US" sz="2800" dirty="0">
+                <a:solidFill>
+                  <a:srgbClr val="FFFF00"/>
+                </a:solidFill>
+                <a:latin typeface="Avenir Medium" panose="02000503020000020003" pitchFamily="2" charset="0"/>
+                <a:ea typeface="Bodoni Ornaments" pitchFamily="2" charset="0"/>
+              </a:rPr>
+              <a:t>       G                C                          A              D </a:t>
+            </a:r>
+          </a:p>
+          <a:p>
+            <a:pPr algn="l"/>
+            <a:r>
+              <a:rPr lang="en-US" sz="2800" dirty="0">
+                <a:solidFill>
+                  <a:schemeClr val="bg1"/>
+                </a:solidFill>
+                <a:latin typeface="Avenir Medium" panose="02000503020000020003" pitchFamily="2" charset="0"/>
+                <a:ea typeface="Bodoni Ornaments" pitchFamily="2" charset="0"/>
+              </a:rPr>
+              <a:t>The trump shall resound and the Lord shall descend</a:t>
+            </a:r>
+          </a:p>
+          <a:p>
+            <a:pPr algn="l"/>
+            <a:r>
+              <a:rPr lang="en-US" sz="2800" dirty="0">
+                <a:solidFill>
+                  <a:srgbClr val="FFFF00"/>
+                </a:solidFill>
+                <a:latin typeface="Avenir Medium" panose="02000503020000020003" pitchFamily="2" charset="0"/>
+                <a:ea typeface="Bodoni Ornaments" pitchFamily="2" charset="0"/>
+              </a:rPr>
+              <a:t>     G               C     D          G</a:t>
+            </a:r>
+          </a:p>
+          <a:p>
+            <a:pPr algn="l"/>
+            <a:r>
+              <a:rPr lang="en-US" sz="2800" dirty="0">
+                <a:solidFill>
+                  <a:schemeClr val="bg1"/>
+                </a:solidFill>
+                <a:latin typeface="Avenir Medium" panose="02000503020000020003" pitchFamily="2" charset="0"/>
+                <a:ea typeface="Bodoni Ornaments" pitchFamily="2" charset="0"/>
+              </a:rPr>
+              <a:t>Even so - it is well with my soul</a:t>
+            </a:r>
+          </a:p>
+        </p:txBody>
+      </p:sp>
+    </p:spTree>
+    <p:extLst>
+      <p:ext uri="{BB962C8B-B14F-4D97-AF65-F5344CB8AC3E}">
+        <p14:creationId xmlns:p14="http://schemas.microsoft.com/office/powerpoint/2010/main" val="2480558772"/>
+      </p:ext>
+    </p:extLst>
+  </p:cSld>
+  <p:clrMapOvr>
+    <a:masterClrMapping/>
+  </p:clrMapOvr>
+</p:sld>
+</file>
+
+<file path=ppt/slides/slide41.xml><?xml version="1.0" encoding="utf-8"?>
+<p:sld xmlns:a="http://schemas.openxmlformats.org/drawingml/2006/main" xmlns:r="http://schemas.openxmlformats.org/officeDocument/2006/relationships" xmlns:p="http://schemas.openxmlformats.org/presentationml/2006/main">
+  <p:cSld>
+    <p:bg>
+      <p:bgPr>
+        <a:solidFill>
           <a:srgbClr val="7030A0"/>
         </a:solidFill>
         <a:effectLst/>
@@ -11372,6 +11677,45 @@
                 <a:ea typeface="Bodoni Ornaments" pitchFamily="2" charset="0"/>
               </a:rPr>
               <a:t>It is well, it is well with my soul</a:t>
+            </a:r>
+          </a:p>
+        </p:txBody>
+      </p:sp>
+      <p:sp>
+        <p:nvSpPr>
+          <p:cNvPr id="2" name="TextBox 1">
+            <a:extLst>
+              <a:ext uri="{FF2B5EF4-FFF2-40B4-BE49-F238E27FC236}">
+                <a16:creationId xmlns:a16="http://schemas.microsoft.com/office/drawing/2014/main" id="{DB47D0B5-E3A1-ED0C-F2D7-1BFAC339A540}"/>
+              </a:ext>
+            </a:extLst>
+          </p:cNvPr>
+          <p:cNvSpPr txBox="1"/>
+          <p:nvPr/>
+        </p:nvSpPr>
+        <p:spPr>
+          <a:xfrm>
+            <a:off x="10668000" y="6175513"/>
+            <a:ext cx="1524000" cy="523220"/>
+          </a:xfrm>
+          <a:prstGeom prst="rect">
+            <a:avLst/>
+          </a:prstGeom>
+          <a:noFill/>
+        </p:spPr>
+        <p:txBody>
+          <a:bodyPr wrap="square" rtlCol="0">
+            <a:spAutoFit/>
+          </a:bodyPr>
+          <a:lstStyle/>
+          <a:p>
+            <a:r>
+              <a:rPr lang="en-US" sz="2800" b="1" dirty="0">
+                <a:solidFill>
+                  <a:srgbClr val="FF0000"/>
+                </a:solidFill>
+              </a:rPr>
+              <a:t>END</a:t>
             </a:r>
           </a:p>
         </p:txBody>
@@ -12473,6 +12817,45 @@
               <a:latin typeface="Avenir Medium" panose="02000503020000020003" pitchFamily="2" charset="0"/>
               <a:ea typeface="Bodoni Ornaments" pitchFamily="2" charset="0"/>
             </a:endParaRPr>
+          </a:p>
+        </p:txBody>
+      </p:sp>
+      <p:sp>
+        <p:nvSpPr>
+          <p:cNvPr id="2" name="TextBox 1">
+            <a:extLst>
+              <a:ext uri="{FF2B5EF4-FFF2-40B4-BE49-F238E27FC236}">
+                <a16:creationId xmlns:a16="http://schemas.microsoft.com/office/drawing/2014/main" id="{96E5417F-8FBC-539D-BA85-6FE944B3908F}"/>
+              </a:ext>
+            </a:extLst>
+          </p:cNvPr>
+          <p:cNvSpPr txBox="1"/>
+          <p:nvPr/>
+        </p:nvSpPr>
+        <p:spPr>
+          <a:xfrm>
+            <a:off x="10668000" y="6175513"/>
+            <a:ext cx="1524000" cy="523220"/>
+          </a:xfrm>
+          <a:prstGeom prst="rect">
+            <a:avLst/>
+          </a:prstGeom>
+          <a:noFill/>
+        </p:spPr>
+        <p:txBody>
+          <a:bodyPr wrap="square" rtlCol="0">
+            <a:spAutoFit/>
+          </a:bodyPr>
+          <a:lstStyle/>
+          <a:p>
+            <a:r>
+              <a:rPr lang="en-US" sz="2800" b="1" dirty="0">
+                <a:solidFill>
+                  <a:srgbClr val="FF0000"/>
+                </a:solidFill>
+              </a:rPr>
+              <a:t>END</a:t>
+            </a:r>
           </a:p>
         </p:txBody>
       </p:sp>
